--- a/output/pptx/ocean-deck-recipe-5.pptx
+++ b/output/pptx/ocean-deck-recipe-5.pptx
@@ -770,7 +770,8 @@
           <a:p>
             <a:r>
               <a:rPr lang="en-US" dirty="0"/>
-              <a:t/>
+              <a:t>Basis: 12-month interval data
+Status: Illustrative</a:t>
             </a:r>
             <a:endParaRPr lang="en-US" dirty="0"/>
           </a:p>
@@ -1533,8 +1534,8 @@
         </p:nvSpPr>
         <p:spPr>
           <a:xfrm>
-            <a:off x="711200" y="5715000"/>
-            <a:ext cx="10769295" cy="201168"/>
+            <a:off x="711200" y="5537200"/>
+            <a:ext cx="10769295" cy="402336"/>
           </a:xfrm>
           <a:prstGeom prst="rect">
             <a:avLst/>
@@ -1548,7 +1549,7 @@
           <a:p>
             <a:pPr algn="l" indent="0" marL="0">
               <a:lnSpc>
-                <a:spcPts val="1116"/>
+                <a:spcPts val="1300"/>
               </a:lnSpc>
               <a:buNone/>
             </a:pPr>
@@ -1561,7 +1562,27 @@
                 <a:ea typeface="Stack Sans Headline Light" pitchFamily="34" charset="-122"/>
                 <a:cs typeface="Stack Sans Headline Light" pitchFamily="34" charset="-120"/>
               </a:rPr>
-              <a:t>Design specimen with illustrative figures and representative images. Do not use for any commercial purpose.</a:t>
+              <a:t>Confidential. Prepared for Ocean RCS. Do not copy, forward or distribute without the written consent of Ocean RCS. Design specimen with illustrative figures and representative images. Do not use for any</a:t>
+            </a:r>
+            <a:endParaRPr lang="en-US" sz="900" dirty="0"/>
+          </a:p>
+          <a:p>
+            <a:pPr algn="l" indent="0" marL="0">
+              <a:lnSpc>
+                <a:spcPts val="1300"/>
+              </a:lnSpc>
+              <a:buNone/>
+            </a:pPr>
+            <a:r>
+              <a:rPr lang="en-US" sz="900" dirty="0">
+                <a:solidFill>
+                  <a:srgbClr val="F3FBF8"/>
+                </a:solidFill>
+                <a:latin typeface="Stack Sans Headline Light" pitchFamily="34" charset="0"/>
+                <a:ea typeface="Stack Sans Headline Light" pitchFamily="34" charset="-122"/>
+                <a:cs typeface="Stack Sans Headline Light" pitchFamily="34" charset="-120"/>
+              </a:rPr>
+              <a:t>commercial purpose.</a:t>
             </a:r>
             <a:endParaRPr lang="en-US" sz="900" dirty="0"/>
           </a:p>
@@ -2550,49 +2571,7 @@
       </p:sp>
       <p:sp>
         <p:nvSpPr>
-          <p:cNvPr id="22" name="ocean:footer"/>
-          <p:cNvSpPr/>
-          <p:nvPr/>
-        </p:nvSpPr>
-        <p:spPr>
-          <a:xfrm>
-            <a:off x="548640" y="6419088"/>
-            <a:ext cx="7315200" cy="182880"/>
-          </a:xfrm>
-          <a:prstGeom prst="rect">
-            <a:avLst/>
-          </a:prstGeom>
-          <a:noFill/>
-          <a:ln/>
-        </p:spPr>
-        <p:txBody>
-          <a:bodyPr wrap="square" lIns="0" tIns="0" rIns="0" bIns="0" rtlCol="0" anchor="t"/>
-          <a:lstStyle/>
-          <a:p>
-            <a:pPr algn="l" indent="0" marL="0">
-              <a:lnSpc>
-                <a:spcPts val="1116"/>
-              </a:lnSpc>
-              <a:buNone/>
-            </a:pPr>
-            <a:r>
-              <a:rPr lang="en-US" sz="900" spc="225" kern="0" dirty="0">
-                <a:solidFill>
-                  <a:srgbClr val="102426"/>
-                </a:solidFill>
-                <a:latin typeface="Stack Sans Headline Light" pitchFamily="34" charset="0"/>
-                <a:ea typeface="Stack Sans Headline Light" pitchFamily="34" charset="-122"/>
-                <a:cs typeface="Stack Sans Headline Light" pitchFamily="34" charset="-120"/>
-              </a:rPr>
-              <a:t>OCEAN RCS · DESIGN SPECIMEN · DO NOT USE</a:t>
-            </a:r>
-            <a:endParaRPr lang="en-US" sz="900" dirty="0"/>
-          </a:p>
-        </p:txBody>
-      </p:sp>
-      <p:sp>
-        <p:nvSpPr>
-          <p:cNvPr id="23" name="ocean:statement"/>
+          <p:cNvPr id="22" name="ocean:statement"/>
           <p:cNvSpPr/>
           <p:nvPr/>
         </p:nvSpPr>
@@ -2742,7 +2721,7 @@
       </p:sp>
       <p:sp>
         <p:nvSpPr>
-          <p:cNvPr id="24" name="ocean:bottom-line"/>
+          <p:cNvPr id="23" name="ocean:bottom-line"/>
           <p:cNvSpPr/>
           <p:nvPr/>
         </p:nvSpPr>
@@ -2806,7 +2785,7 @@
       </p:sp>
       <p:sp>
         <p:nvSpPr>
-          <p:cNvPr id="25" name="Shape 22"/>
+          <p:cNvPr id="24" name="Shape 21"/>
           <p:cNvSpPr/>
           <p:nvPr/>
         </p:nvSpPr>
@@ -2831,7 +2810,7 @@
       </p:sp>
       <p:sp>
         <p:nvSpPr>
-          <p:cNvPr id="26" name="ocean:label"/>
+          <p:cNvPr id="25" name="ocean:label"/>
           <p:cNvSpPr/>
           <p:nvPr/>
         </p:nvSpPr>
@@ -2873,7 +2852,7 @@
       </p:sp>
       <p:sp>
         <p:nvSpPr>
-          <p:cNvPr id="27" name="ocean:bottom-line"/>
+          <p:cNvPr id="26" name="ocean:bottom-line"/>
           <p:cNvSpPr/>
           <p:nvPr/>
         </p:nvSpPr>
@@ -2910,6 +2889,48 @@
               <a:t>No service upgrade needed for the first phase.</a:t>
             </a:r>
             <a:endParaRPr lang="en-US" sz="1500" dirty="0"/>
+          </a:p>
+        </p:txBody>
+      </p:sp>
+      <p:sp>
+        <p:nvSpPr>
+          <p:cNvPr id="27" name="ocean:footer"/>
+          <p:cNvSpPr/>
+          <p:nvPr/>
+        </p:nvSpPr>
+        <p:spPr>
+          <a:xfrm>
+            <a:off x="548640" y="6419088"/>
+            <a:ext cx="7315200" cy="182880"/>
+          </a:xfrm>
+          <a:prstGeom prst="rect">
+            <a:avLst/>
+          </a:prstGeom>
+          <a:noFill/>
+          <a:ln/>
+        </p:spPr>
+        <p:txBody>
+          <a:bodyPr wrap="square" lIns="0" tIns="0" rIns="0" bIns="0" rtlCol="0" anchor="t"/>
+          <a:lstStyle/>
+          <a:p>
+            <a:pPr algn="l" indent="0" marL="0">
+              <a:lnSpc>
+                <a:spcPts val="1116"/>
+              </a:lnSpc>
+              <a:buNone/>
+            </a:pPr>
+            <a:r>
+              <a:rPr lang="en-US" sz="900" spc="225" kern="0" dirty="0">
+                <a:solidFill>
+                  <a:srgbClr val="102426"/>
+                </a:solidFill>
+                <a:latin typeface="Stack Sans Headline Light" pitchFamily="34" charset="0"/>
+                <a:ea typeface="Stack Sans Headline Light" pitchFamily="34" charset="-122"/>
+                <a:cs typeface="Stack Sans Headline Light" pitchFamily="34" charset="-120"/>
+              </a:rPr>
+              <a:t>OCEAN RCS · CONFIDENTIAL · DESIGN SPECIMEN · DO NOT USE</a:t>
+            </a:r>
+            <a:endParaRPr lang="en-US" sz="900" dirty="0"/>
           </a:p>
         </p:txBody>
       </p:sp>
@@ -2927,7 +2948,7 @@
     <p:bg>
       <p:bgPr>
         <a:solidFill>
-          <a:srgbClr val="D5CCA0"/>
+          <a:srgbClr val="F3FBF8"/>
         </a:solidFill>
       </p:bgPr>
     </p:bg>
@@ -3218,7 +3239,7 @@
             <a:r>
               <a:rPr lang="en-US" sz="900" b="1" spc="108" kern="0" dirty="0">
                 <a:solidFill>
-                  <a:srgbClr val="D5CCA0"/>
+                  <a:srgbClr val="F3FBF8"/>
                 </a:solidFill>
                 <a:latin typeface="Stack Sans Headline" pitchFamily="34" charset="0"/>
                 <a:ea typeface="Stack Sans Headline" pitchFamily="34" charset="-122"/>
@@ -3480,7 +3501,7 @@
             <a:r>
               <a:rPr lang="en-US" sz="1100" b="1" spc="110" kern="0" dirty="0">
                 <a:solidFill>
-                  <a:srgbClr val="D5CCA0"/>
+                  <a:srgbClr val="F3FBF8"/>
                 </a:solidFill>
                 <a:latin typeface="Stack Sans Headline" pitchFamily="34" charset="0"/>
                 <a:ea typeface="Stack Sans Headline" pitchFamily="34" charset="-122"/>
@@ -3681,51 +3702,9 @@
           </a:ln>
         </p:spPr>
       </p:sp>
-      <p:sp>
-        <p:nvSpPr>
-          <p:cNvPr id="23" name="ocean:footer"/>
-          <p:cNvSpPr/>
-          <p:nvPr/>
-        </p:nvSpPr>
-        <p:spPr>
-          <a:xfrm>
-            <a:off x="548640" y="6419088"/>
-            <a:ext cx="7315200" cy="182880"/>
-          </a:xfrm>
-          <a:prstGeom prst="rect">
-            <a:avLst/>
-          </a:prstGeom>
-          <a:noFill/>
-          <a:ln/>
-        </p:spPr>
-        <p:txBody>
-          <a:bodyPr wrap="square" lIns="0" tIns="0" rIns="0" bIns="0" rtlCol="0" anchor="t"/>
-          <a:lstStyle/>
-          <a:p>
-            <a:pPr algn="l" indent="0" marL="0">
-              <a:lnSpc>
-                <a:spcPts val="1116"/>
-              </a:lnSpc>
-              <a:buNone/>
-            </a:pPr>
-            <a:r>
-              <a:rPr lang="en-US" sz="900" spc="225" kern="0" dirty="0">
-                <a:solidFill>
-                  <a:srgbClr val="1B4039"/>
-                </a:solidFill>
-                <a:latin typeface="Stack Sans Headline Light" pitchFamily="34" charset="0"/>
-                <a:ea typeface="Stack Sans Headline Light" pitchFamily="34" charset="-122"/>
-                <a:cs typeface="Stack Sans Headline Light" pitchFamily="34" charset="-120"/>
-              </a:rPr>
-              <a:t>OCEAN RCS · DESIGN SPECIMEN · DO NOT USE</a:t>
-            </a:r>
-            <a:endParaRPr lang="en-US" sz="900" dirty="0"/>
-          </a:p>
-        </p:txBody>
-      </p:sp>
       <p:pic>
         <p:nvPicPr>
-          <p:cNvPr id="24" name="ocean:photo" descr="/home/user/workspace/audit/repo/output/.cache/fit/bess-fcf5b005fbb1696b.jpg">    </p:cNvPr>
+          <p:cNvPr id="23" name="ocean:photo" descr="/home/user/workspace/audit/repo/output/.cache/fit/bess-fcf5b005fbb1696b.jpg">    </p:cNvPr>
           <p:cNvPicPr>
             <a:picLocks noChangeAspect="1"/>
           </p:cNvPicPr>
@@ -3749,7 +3728,7 @@
       </p:pic>
       <p:sp>
         <p:nvSpPr>
-          <p:cNvPr id="25" name="Shape 21"/>
+          <p:cNvPr id="24" name="Shape 20"/>
           <p:cNvSpPr/>
           <p:nvPr/>
         </p:nvSpPr>
@@ -3762,11 +3741,11 @@
             <a:avLst/>
           </a:prstGeom>
           <a:solidFill>
-            <a:srgbClr val="D5CCA0"/>
+            <a:srgbClr val="F3FBF8"/>
           </a:solidFill>
           <a:ln w="12700">
             <a:solidFill>
-              <a:srgbClr val="D5CCA0"/>
+              <a:srgbClr val="F3FBF8"/>
             </a:solidFill>
             <a:prstDash val="solid"/>
           </a:ln>
@@ -3774,7 +3753,7 @@
       </p:sp>
       <p:sp>
         <p:nvSpPr>
-          <p:cNvPr id="26" name="ocean:frame"/>
+          <p:cNvPr id="25" name="ocean:frame"/>
           <p:cNvSpPr/>
           <p:nvPr/>
         </p:nvSpPr>
@@ -3835,7 +3814,7 @@
       </p:sp>
       <p:sp>
         <p:nvSpPr>
-          <p:cNvPr id="27" name="Shape 23"/>
+          <p:cNvPr id="26" name="Shape 22"/>
           <p:cNvSpPr/>
           <p:nvPr/>
         </p:nvSpPr>
@@ -3860,7 +3839,7 @@
       </p:sp>
       <p:sp>
         <p:nvSpPr>
-          <p:cNvPr id="28" name="ocean:label"/>
+          <p:cNvPr id="27" name="ocean:label"/>
           <p:cNvSpPr/>
           <p:nvPr/>
         </p:nvSpPr>
@@ -3902,7 +3881,7 @@
       </p:sp>
       <p:sp>
         <p:nvSpPr>
-          <p:cNvPr id="29" name="ocean:body"/>
+          <p:cNvPr id="28" name="ocean:body"/>
           <p:cNvSpPr/>
           <p:nvPr/>
         </p:nvSpPr>
@@ -3944,7 +3923,7 @@
       </p:sp>
       <p:sp>
         <p:nvSpPr>
-          <p:cNvPr id="30" name="ocean:frame"/>
+          <p:cNvPr id="29" name="ocean:frame"/>
           <p:cNvSpPr/>
           <p:nvPr/>
         </p:nvSpPr>
@@ -4005,7 +3984,7 @@
       </p:sp>
       <p:sp>
         <p:nvSpPr>
-          <p:cNvPr id="31" name="Shape 27"/>
+          <p:cNvPr id="30" name="Shape 26"/>
           <p:cNvSpPr/>
           <p:nvPr/>
         </p:nvSpPr>
@@ -4030,7 +4009,7 @@
       </p:sp>
       <p:sp>
         <p:nvSpPr>
-          <p:cNvPr id="32" name="Shape 28"/>
+          <p:cNvPr id="31" name="Shape 27"/>
           <p:cNvSpPr/>
           <p:nvPr/>
         </p:nvSpPr>
@@ -4055,7 +4034,7 @@
       </p:sp>
       <p:sp>
         <p:nvSpPr>
-          <p:cNvPr id="33" name="ocean:label"/>
+          <p:cNvPr id="32" name="ocean:label"/>
           <p:cNvSpPr/>
           <p:nvPr/>
         </p:nvSpPr>
@@ -4097,7 +4076,7 @@
       </p:sp>
       <p:sp>
         <p:nvSpPr>
-          <p:cNvPr id="34" name="ocean:body"/>
+          <p:cNvPr id="33" name="ocean:body"/>
           <p:cNvSpPr/>
           <p:nvPr/>
         </p:nvSpPr>
@@ -4139,7 +4118,7 @@
       </p:sp>
       <p:sp>
         <p:nvSpPr>
-          <p:cNvPr id="35" name="ocean:frame"/>
+          <p:cNvPr id="34" name="ocean:frame"/>
           <p:cNvSpPr/>
           <p:nvPr/>
         </p:nvSpPr>
@@ -4200,7 +4179,7 @@
       </p:sp>
       <p:sp>
         <p:nvSpPr>
-          <p:cNvPr id="36" name="Shape 32"/>
+          <p:cNvPr id="35" name="Shape 31"/>
           <p:cNvSpPr/>
           <p:nvPr/>
         </p:nvSpPr>
@@ -4225,7 +4204,7 @@
       </p:sp>
       <p:sp>
         <p:nvSpPr>
-          <p:cNvPr id="37" name="Shape 33"/>
+          <p:cNvPr id="36" name="Shape 32"/>
           <p:cNvSpPr/>
           <p:nvPr/>
         </p:nvSpPr>
@@ -4250,7 +4229,7 @@
       </p:sp>
       <p:sp>
         <p:nvSpPr>
-          <p:cNvPr id="38" name="Shape 34"/>
+          <p:cNvPr id="37" name="Shape 33"/>
           <p:cNvSpPr/>
           <p:nvPr/>
         </p:nvSpPr>
@@ -4275,7 +4254,7 @@
       </p:sp>
       <p:sp>
         <p:nvSpPr>
-          <p:cNvPr id="39" name="ocean:label"/>
+          <p:cNvPr id="38" name="ocean:label"/>
           <p:cNvSpPr/>
           <p:nvPr/>
         </p:nvSpPr>
@@ -4317,7 +4296,7 @@
       </p:sp>
       <p:sp>
         <p:nvSpPr>
-          <p:cNvPr id="40" name="ocean:body"/>
+          <p:cNvPr id="39" name="ocean:body"/>
           <p:cNvSpPr/>
           <p:nvPr/>
         </p:nvSpPr>
@@ -4359,7 +4338,7 @@
       </p:sp>
       <p:sp>
         <p:nvSpPr>
-          <p:cNvPr id="41" name="ocean:body"/>
+          <p:cNvPr id="40" name="ocean:body"/>
           <p:cNvSpPr/>
           <p:nvPr/>
         </p:nvSpPr>
@@ -4396,6 +4375,48 @@
               <a:t>Representative image of a comparable storage installation.</a:t>
             </a:r>
             <a:endParaRPr lang="en-US" sz="1200" dirty="0"/>
+          </a:p>
+        </p:txBody>
+      </p:sp>
+      <p:sp>
+        <p:nvSpPr>
+          <p:cNvPr id="41" name="ocean:footer"/>
+          <p:cNvSpPr/>
+          <p:nvPr/>
+        </p:nvSpPr>
+        <p:spPr>
+          <a:xfrm>
+            <a:off x="548640" y="6419088"/>
+            <a:ext cx="7315200" cy="182880"/>
+          </a:xfrm>
+          <a:prstGeom prst="rect">
+            <a:avLst/>
+          </a:prstGeom>
+          <a:noFill/>
+          <a:ln/>
+        </p:spPr>
+        <p:txBody>
+          <a:bodyPr wrap="square" lIns="0" tIns="0" rIns="0" bIns="0" rtlCol="0" anchor="t"/>
+          <a:lstStyle/>
+          <a:p>
+            <a:pPr algn="l" indent="0" marL="0">
+              <a:lnSpc>
+                <a:spcPts val="1116"/>
+              </a:lnSpc>
+              <a:buNone/>
+            </a:pPr>
+            <a:r>
+              <a:rPr lang="en-US" sz="900" spc="225" kern="0" dirty="0">
+                <a:solidFill>
+                  <a:srgbClr val="1B4039"/>
+                </a:solidFill>
+                <a:latin typeface="Stack Sans Headline Light" pitchFamily="34" charset="0"/>
+                <a:ea typeface="Stack Sans Headline Light" pitchFamily="34" charset="-122"/>
+                <a:cs typeface="Stack Sans Headline Light" pitchFamily="34" charset="-120"/>
+              </a:rPr>
+              <a:t>OCEAN RCS · CONFIDENTIAL · DESIGN SPECIMEN · DO NOT USE</a:t>
+            </a:r>
+            <a:endParaRPr lang="en-US" sz="900" dirty="0"/>
           </a:p>
         </p:txBody>
       </p:sp>
@@ -4413,7 +4434,7 @@
     <p:bg>
       <p:bgPr>
         <a:solidFill>
-          <a:srgbClr val="0B1617"/>
+          <a:srgbClr val="D5CCA0"/>
         </a:solidFill>
       </p:bgPr>
     </p:bg>
@@ -4433,7 +4454,7 @@
       </p:grpSpPr>
       <p:pic>
         <p:nvPicPr>
-          <p:cNvPr id="2" name="ocean:texture" descr="/home/user/workspace/audit/repo/assets/textures/tex_deck_blackmoss.png">    </p:cNvPr>
+          <p:cNvPr id="2" name="ocean:logo-graphic" descr="/home/user/workspace/audit/repo/assets/logos/png/logo_graphic_crimson.png">    </p:cNvPr>
           <p:cNvPicPr>
             <a:picLocks noChangeAspect="1"/>
           </p:cNvPicPr>
@@ -4447,30 +4468,6 @@
         </p:blipFill>
         <p:spPr>
           <a:xfrm>
-            <a:off x="0" y="0"/>
-            <a:ext cx="12191695" cy="6858000"/>
-          </a:xfrm>
-          <a:prstGeom prst="rect">
-            <a:avLst/>
-          </a:prstGeom>
-        </p:spPr>
-      </p:pic>
-      <p:pic>
-        <p:nvPicPr>
-          <p:cNvPr id="3" name="ocean:logo-graphic" descr="/home/user/workspace/audit/repo/assets/logos/png/logo_graphic_honeydew.png">    </p:cNvPr>
-          <p:cNvPicPr>
-            <a:picLocks noChangeAspect="1"/>
-          </p:cNvPicPr>
-          <p:nvPr/>
-        </p:nvPicPr>
-        <p:blipFill>
-          <a:blip r:embed="rId2"/>
-          <a:stretch>
-            <a:fillRect/>
-          </a:stretch>
-        </p:blipFill>
-        <p:spPr>
-          <a:xfrm>
             <a:off x="11287455" y="406400"/>
             <a:ext cx="355600" cy="355600"/>
           </a:xfrm>
@@ -4481,49 +4478,7 @@
       </p:pic>
       <p:sp>
         <p:nvSpPr>
-          <p:cNvPr id="4" name="ocean:label"/>
-          <p:cNvSpPr/>
-          <p:nvPr/>
-        </p:nvSpPr>
-        <p:spPr>
-          <a:xfrm>
-            <a:off x="548640" y="3401568"/>
-            <a:ext cx="4937760" cy="201168"/>
-          </a:xfrm>
-          <a:prstGeom prst="rect">
-            <a:avLst/>
-          </a:prstGeom>
-          <a:noFill/>
-          <a:ln/>
-        </p:spPr>
-        <p:txBody>
-          <a:bodyPr wrap="square" lIns="0" tIns="0" rIns="0" bIns="0" rtlCol="0" anchor="t"/>
-          <a:lstStyle/>
-          <a:p>
-            <a:pPr algn="l" indent="0" marL="0">
-              <a:lnSpc>
-                <a:spcPts val="1364"/>
-              </a:lnSpc>
-              <a:buNone/>
-            </a:pPr>
-            <a:r>
-              <a:rPr lang="en-US" sz="1100" b="1" spc="275" kern="0" dirty="0">
-                <a:solidFill>
-                  <a:srgbClr val="F3FBF8"/>
-                </a:solidFill>
-                <a:latin typeface="Stack Sans Headline" pitchFamily="34" charset="0"/>
-                <a:ea typeface="Stack Sans Headline" pitchFamily="34" charset="-122"/>
-                <a:cs typeface="Stack Sans Headline" pitchFamily="34" charset="-120"/>
-              </a:rPr>
-              <a:t>ECONOMICS</a:t>
-            </a:r>
-            <a:endParaRPr lang="en-US" sz="1100" dirty="0"/>
-          </a:p>
-        </p:txBody>
-      </p:sp>
-      <p:sp>
-        <p:nvSpPr>
-          <p:cNvPr id="5" name="ocean:metric"/>
+          <p:cNvPr id="3" name="ocean:metric"/>
           <p:cNvSpPr/>
           <p:nvPr/>
         </p:nvSpPr>
@@ -4565,14 +4520,14 @@
       </p:sp>
       <p:sp>
         <p:nvSpPr>
-          <p:cNvPr id="6" name="ocean:statement"/>
-          <p:cNvSpPr/>
-          <p:nvPr/>
-        </p:nvSpPr>
-        <p:spPr>
-          <a:xfrm>
-            <a:off x="5458968" y="4059936"/>
-            <a:ext cx="6217920" cy="1645920"/>
+          <p:cNvPr id="4" name="ocean:statement"/>
+          <p:cNvSpPr/>
+          <p:nvPr/>
+        </p:nvSpPr>
+        <p:spPr>
+          <a:xfrm>
+            <a:off x="5458968" y="3931920"/>
+            <a:ext cx="6217920" cy="1920240"/>
           </a:xfrm>
           <a:prstGeom prst="rect">
             <a:avLst/>
@@ -4586,14 +4541,14 @@
           <a:p>
             <a:pPr algn="l" indent="0" marL="0">
               <a:lnSpc>
-                <a:spcPts val="4200"/>
-              </a:lnSpc>
-              <a:buNone/>
-            </a:pPr>
-            <a:r>
-              <a:rPr lang="en-US" sz="3800" spc="-76" kern="0" dirty="0">
-                <a:solidFill>
-                  <a:srgbClr val="F3FBF8"/>
+                <a:spcPts val="4800"/>
+              </a:lnSpc>
+              <a:buNone/>
+            </a:pPr>
+            <a:r>
+              <a:rPr lang="en-US" sz="4400" spc="-88" kern="0" dirty="0">
+                <a:solidFill>
+                  <a:srgbClr val="EB3819"/>
                 </a:solidFill>
                 <a:latin typeface="Stack Sans Headline Medium" pitchFamily="34" charset="0"/>
                 <a:ea typeface="Stack Sans Headline Medium" pitchFamily="34" charset="-122"/>
@@ -4601,33 +4556,53 @@
               </a:rPr>
               <a:t>Lower grid electricity</a:t>
             </a:r>
-            <a:endParaRPr lang="en-US" sz="3800" dirty="0"/>
-          </a:p>
-          <a:p>
-            <a:pPr algn="l" indent="0" marL="0">
-              <a:lnSpc>
-                <a:spcPts val="4200"/>
-              </a:lnSpc>
-              <a:buNone/>
-            </a:pPr>
-            <a:r>
-              <a:rPr lang="en-US" sz="3800" spc="-76" kern="0" dirty="0">
-                <a:solidFill>
-                  <a:srgbClr val="F3FBF8"/>
+            <a:endParaRPr lang="en-US" sz="4400" dirty="0"/>
+          </a:p>
+          <a:p>
+            <a:pPr algn="l" indent="0" marL="0">
+              <a:lnSpc>
+                <a:spcPts val="4800"/>
+              </a:lnSpc>
+              <a:buNone/>
+            </a:pPr>
+            <a:r>
+              <a:rPr lang="en-US" sz="4400" spc="-88" kern="0" dirty="0">
+                <a:solidFill>
+                  <a:srgbClr val="EB3819"/>
                 </a:solidFill>
                 <a:latin typeface="Stack Sans Headline Medium" pitchFamily="34" charset="0"/>
                 <a:ea typeface="Stack Sans Headline Medium" pitchFamily="34" charset="-122"/>
                 <a:cs typeface="Stack Sans Headline Medium" pitchFamily="34" charset="-120"/>
               </a:rPr>
-              <a:t>spend from the first year</a:t>
-            </a:r>
-            <a:endParaRPr lang="en-US" sz="3800" dirty="0"/>
-          </a:p>
-        </p:txBody>
-      </p:sp>
-      <p:sp>
-        <p:nvSpPr>
-          <p:cNvPr id="7" name="Shape 3"/>
+              <a:t>spend from the first</a:t>
+            </a:r>
+            <a:endParaRPr lang="en-US" sz="4400" dirty="0"/>
+          </a:p>
+          <a:p>
+            <a:pPr algn="l" indent="0" marL="0">
+              <a:lnSpc>
+                <a:spcPts val="4800"/>
+              </a:lnSpc>
+              <a:buNone/>
+            </a:pPr>
+            <a:r>
+              <a:rPr lang="en-US" sz="4400" spc="-88" kern="0" dirty="0">
+                <a:solidFill>
+                  <a:srgbClr val="EB3819"/>
+                </a:solidFill>
+                <a:latin typeface="Stack Sans Headline Medium" pitchFamily="34" charset="0"/>
+                <a:ea typeface="Stack Sans Headline Medium" pitchFamily="34" charset="-122"/>
+                <a:cs typeface="Stack Sans Headline Medium" pitchFamily="34" charset="-120"/>
+              </a:rPr>
+              <a:t>year</a:t>
+            </a:r>
+            <a:endParaRPr lang="en-US" sz="4400" dirty="0"/>
+          </a:p>
+        </p:txBody>
+      </p:sp>
+      <p:sp>
+        <p:nvSpPr>
+          <p:cNvPr id="5" name="Shape 2"/>
           <p:cNvSpPr/>
           <p:nvPr/>
         </p:nvSpPr>
@@ -4642,179 +4617,11 @@
           <a:noFill/>
           <a:ln w="12700">
             <a:solidFill>
-              <a:srgbClr val="F3FBF8"/>
+              <a:srgbClr val="EB3819"/>
             </a:solidFill>
             <a:prstDash val="solid"/>
           </a:ln>
         </p:spPr>
-      </p:sp>
-      <p:sp>
-        <p:nvSpPr>
-          <p:cNvPr id="8" name="ocean:meta"/>
-          <p:cNvSpPr/>
-          <p:nvPr/>
-        </p:nvSpPr>
-        <p:spPr>
-          <a:xfrm>
-            <a:off x="548640" y="6134100"/>
-            <a:ext cx="580009" cy="201168"/>
-          </a:xfrm>
-          <a:prstGeom prst="rect">
-            <a:avLst/>
-          </a:prstGeom>
-          <a:noFill/>
-          <a:ln/>
-        </p:spPr>
-        <p:txBody>
-          <a:bodyPr wrap="square" lIns="0" tIns="0" rIns="0" bIns="0" rtlCol="0" anchor="t"/>
-          <a:lstStyle/>
-          <a:p>
-            <a:pPr algn="l" indent="0" marL="0">
-              <a:lnSpc>
-                <a:spcPts val="1240"/>
-              </a:lnSpc>
-              <a:buNone/>
-            </a:pPr>
-            <a:r>
-              <a:rPr lang="en-US" sz="1000" spc="250" kern="0" dirty="0">
-                <a:solidFill>
-                  <a:srgbClr val="F3FBF8"/>
-                </a:solidFill>
-                <a:latin typeface="Stack Sans Headline Light" pitchFamily="34" charset="0"/>
-                <a:ea typeface="Stack Sans Headline Light" pitchFamily="34" charset="-122"/>
-                <a:cs typeface="Stack Sans Headline Light" pitchFamily="34" charset="-120"/>
-              </a:rPr>
-              <a:t>BASIS</a:t>
-            </a:r>
-            <a:endParaRPr lang="en-US" sz="1000" dirty="0"/>
-          </a:p>
-        </p:txBody>
-      </p:sp>
-      <p:sp>
-        <p:nvSpPr>
-          <p:cNvPr id="9" name="ocean:meta"/>
-          <p:cNvSpPr/>
-          <p:nvPr/>
-        </p:nvSpPr>
-        <p:spPr>
-          <a:xfrm>
-            <a:off x="1238377" y="6134100"/>
-            <a:ext cx="2356231" cy="201168"/>
-          </a:xfrm>
-          <a:prstGeom prst="rect">
-            <a:avLst/>
-          </a:prstGeom>
-          <a:noFill/>
-          <a:ln/>
-        </p:spPr>
-        <p:txBody>
-          <a:bodyPr wrap="square" lIns="0" tIns="0" rIns="0" bIns="0" rtlCol="0" anchor="t"/>
-          <a:lstStyle/>
-          <a:p>
-            <a:pPr algn="l" indent="0" marL="0">
-              <a:lnSpc>
-                <a:spcPts val="1240"/>
-              </a:lnSpc>
-              <a:buNone/>
-            </a:pPr>
-            <a:r>
-              <a:rPr lang="en-US" sz="1000" b="1" spc="250" kern="0" dirty="0">
-                <a:solidFill>
-                  <a:srgbClr val="F3FBF8"/>
-                </a:solidFill>
-                <a:latin typeface="Stack Sans Headline" pitchFamily="34" charset="0"/>
-                <a:ea typeface="Stack Sans Headline" pitchFamily="34" charset="-122"/>
-                <a:cs typeface="Stack Sans Headline" pitchFamily="34" charset="-120"/>
-              </a:rPr>
-              <a:t>12-MONTH INTERVAL DATA</a:t>
-            </a:r>
-            <a:endParaRPr lang="en-US" sz="1000" dirty="0"/>
-          </a:p>
-        </p:txBody>
-      </p:sp>
-      <p:sp>
-        <p:nvSpPr>
-          <p:cNvPr id="10" name="ocean:meta"/>
-          <p:cNvSpPr/>
-          <p:nvPr/>
-        </p:nvSpPr>
-        <p:spPr>
-          <a:xfrm>
-            <a:off x="4033520" y="6134100"/>
-            <a:ext cx="717423" cy="201168"/>
-          </a:xfrm>
-          <a:prstGeom prst="rect">
-            <a:avLst/>
-          </a:prstGeom>
-          <a:noFill/>
-          <a:ln/>
-        </p:spPr>
-        <p:txBody>
-          <a:bodyPr wrap="square" lIns="0" tIns="0" rIns="0" bIns="0" rtlCol="0" anchor="t"/>
-          <a:lstStyle/>
-          <a:p>
-            <a:pPr algn="l" indent="0" marL="0">
-              <a:lnSpc>
-                <a:spcPts val="1240"/>
-              </a:lnSpc>
-              <a:buNone/>
-            </a:pPr>
-            <a:r>
-              <a:rPr lang="en-US" sz="1000" spc="250" kern="0" dirty="0">
-                <a:solidFill>
-                  <a:srgbClr val="F3FBF8"/>
-                </a:solidFill>
-                <a:latin typeface="Stack Sans Headline Light" pitchFamily="34" charset="0"/>
-                <a:ea typeface="Stack Sans Headline Light" pitchFamily="34" charset="-122"/>
-                <a:cs typeface="Stack Sans Headline Light" pitchFamily="34" charset="-120"/>
-              </a:rPr>
-              <a:t>STATUS</a:t>
-            </a:r>
-            <a:endParaRPr lang="en-US" sz="1000" dirty="0"/>
-          </a:p>
-        </p:txBody>
-      </p:sp>
-      <p:sp>
-        <p:nvSpPr>
-          <p:cNvPr id="11" name="ocean:meta"/>
-          <p:cNvSpPr/>
-          <p:nvPr/>
-        </p:nvSpPr>
-        <p:spPr>
-          <a:xfrm>
-            <a:off x="4860671" y="6134100"/>
-            <a:ext cx="1280922" cy="201168"/>
-          </a:xfrm>
-          <a:prstGeom prst="rect">
-            <a:avLst/>
-          </a:prstGeom>
-          <a:noFill/>
-          <a:ln/>
-        </p:spPr>
-        <p:txBody>
-          <a:bodyPr wrap="square" lIns="0" tIns="0" rIns="0" bIns="0" rtlCol="0" anchor="t"/>
-          <a:lstStyle/>
-          <a:p>
-            <a:pPr algn="l" indent="0" marL="0">
-              <a:lnSpc>
-                <a:spcPts val="1240"/>
-              </a:lnSpc>
-              <a:buNone/>
-            </a:pPr>
-            <a:r>
-              <a:rPr lang="en-US" sz="1000" b="1" spc="250" kern="0" dirty="0">
-                <a:solidFill>
-                  <a:srgbClr val="F3FBF8"/>
-                </a:solidFill>
-                <a:latin typeface="Stack Sans Headline" pitchFamily="34" charset="0"/>
-                <a:ea typeface="Stack Sans Headline" pitchFamily="34" charset="-122"/>
-                <a:cs typeface="Stack Sans Headline" pitchFamily="34" charset="-120"/>
-              </a:rPr>
-              <a:t>ILLUSTRATIVE</a:t>
-            </a:r>
-            <a:endParaRPr lang="en-US" sz="1000" dirty="0"/>
-          </a:p>
-        </p:txBody>
       </p:sp>
     </p:spTree>
   </p:cSld>

--- a/output/pptx/ocean-deck-recipe-5.pptx
+++ b/output/pptx/ocean-deck-recipe-5.pptx
@@ -4623,6 +4623,48 @@
           </a:ln>
         </p:spPr>
       </p:sp>
+      <p:sp>
+        <p:nvSpPr>
+          <p:cNvPr id="7" name="ocean:footer"/>
+          <p:cNvSpPr/>
+          <p:nvPr/>
+        </p:nvSpPr>
+        <p:spPr>
+          <a:xfrm>
+            <a:off x="548640" y="6419088"/>
+            <a:ext cx="7315200" cy="182880"/>
+          </a:xfrm>
+          <a:prstGeom prst="rect">
+            <a:avLst/>
+          </a:prstGeom>
+          <a:noFill/>
+          <a:ln/>
+        </p:spPr>
+        <p:txBody>
+          <a:bodyPr wrap="square" lIns="0" tIns="0" rIns="0" bIns="0" rtlCol="0" anchor="t"/>
+          <a:lstStyle/>
+          <a:p>
+            <a:pPr algn="l" indent="0" marL="0">
+              <a:lnSpc>
+                <a:spcPts val="1116"/>
+              </a:lnSpc>
+              <a:buNone/>
+            </a:pPr>
+            <a:r>
+              <a:rPr lang="en-US" sz="900" spc="225" kern="0" dirty="0">
+                <a:solidFill>
+                  <a:srgbClr val="0B1617"/>
+                </a:solidFill>
+                <a:latin typeface="Stack Sans Headline Light" pitchFamily="34" charset="0"/>
+                <a:ea typeface="Stack Sans Headline Light" pitchFamily="34" charset="-122"/>
+                <a:cs typeface="Stack Sans Headline Light" pitchFamily="34" charset="-120"/>
+              </a:rPr>
+              <a:t>OCEAN RCS · CONFIDENTIAL · DESIGN SPECIMEN · DO NOT USE</a:t>
+            </a:r>
+            <a:endParaRPr lang="en-US" sz="900" dirty="0"/>
+          </a:p>
+        </p:txBody>
+      </p:sp>
     </p:spTree>
   </p:cSld>
   <p:clrMapOvr>

--- a/output/pptx/ocean-deck-recipe-5.pptx
+++ b/output/pptx/ocean-deck-recipe-5.pptx
@@ -1430,7 +1430,7 @@
         </p:nvSpPr>
         <p:spPr>
           <a:xfrm>
-            <a:off x="711200" y="3017520"/>
+            <a:off x="711200" y="2761488"/>
             <a:ext cx="10769295" cy="228600"/>
           </a:xfrm>
           <a:prstGeom prst="rect">
